--- a/assets/powerpoints/module-vetements/B2-dire-ce-qui-ne-va-pas.pptx
+++ b/assets/powerpoints/module-vetements/B2-dire-ce-qui-ne-va-pas.pptx
@@ -10914,7 +10914,61 @@
                 </a:solidFill>
                 <a:latin typeface="Verdana"/>
               </a:rPr>
-              <a:t>« Il est &lt;b&gt;un peu&lt;/b&gt; &lt;b&gt;serré&lt;/b&gt; &lt;b&gt;aux épaules&lt;/b&gt;. » Les trois morceaux ensemble donnent à la personne tout ce qu'il lui faut. Sans l'endroit, elle apportera une autre taille ; avec l'endroit, elle peut proposer une autre coupe.</a:t>
+              <a:t>« Il est </a:t>
+            </a:r>
+            <a:r>
+              <a:rPr sz="2000" b="1" i="0">
+                <a:solidFill>
+                  <a:srgbClr val="4B4F52"/>
+                </a:solidFill>
+                <a:latin typeface="Verdana"/>
+              </a:rPr>
+              <a:t>un peu</a:t>
+            </a:r>
+            <a:r>
+              <a:rPr sz="2000" b="0" i="0">
+                <a:solidFill>
+                  <a:srgbClr val="4B4F52"/>
+                </a:solidFill>
+                <a:latin typeface="Verdana"/>
+              </a:rPr>
+              <a:t> </a:t>
+            </a:r>
+            <a:r>
+              <a:rPr sz="2000" b="1" i="0">
+                <a:solidFill>
+                  <a:srgbClr val="4B4F52"/>
+                </a:solidFill>
+                <a:latin typeface="Verdana"/>
+              </a:rPr>
+              <a:t>serré</a:t>
+            </a:r>
+            <a:r>
+              <a:rPr sz="2000" b="0" i="0">
+                <a:solidFill>
+                  <a:srgbClr val="4B4F52"/>
+                </a:solidFill>
+                <a:latin typeface="Verdana"/>
+              </a:rPr>
+              <a:t> </a:t>
+            </a:r>
+            <a:r>
+              <a:rPr sz="2000" b="1" i="0">
+                <a:solidFill>
+                  <a:srgbClr val="4B4F52"/>
+                </a:solidFill>
+                <a:latin typeface="Verdana"/>
+              </a:rPr>
+              <a:t>aux épaules</a:t>
+            </a:r>
+            <a:r>
+              <a:rPr sz="2000" b="0" i="0">
+                <a:solidFill>
+                  <a:srgbClr val="4B4F52"/>
+                </a:solidFill>
+                <a:latin typeface="Verdana"/>
+              </a:rPr>
+              <a:t>. » Les trois morceaux ensemble donnent à la personne tout ce qu'il lui faut. Sans l'endroit, elle apportera une autre taille ; avec l'endroit, elle peut proposer une autre coupe.</a:t>
             </a:r>
           </a:p>
         </p:txBody>
